--- a/WEEK_2_Day_9_Mentor_Review.pptx
+++ b/WEEK_2_Day_9_Mentor_Review.pptx
@@ -3176,6 +3176,44 @@
             </a:pPr>
             <a:r>
               <a:t>  • Plot this mean intensity over time (frames) to visualize the raw physical OOK signal.</a:t>
+            </a:r>
+          </a:p>
+        </p:txBody>
+      </p:sp>
+      <p:sp>
+        <p:nvSpPr>
+          <p:cNvPr id="4" name="TextBox 3"/>
+          <p:cNvSpPr txBox="1"/>
+          <p:nvPr/>
+        </p:nvSpPr>
+        <p:spPr>
+          <a:xfrm>
+            <a:off x="457200" y="182880"/>
+            <a:ext cx="4572000" cy="914400"/>
+          </a:xfrm>
+          <a:prstGeom prst="rect">
+            <a:avLst/>
+          </a:prstGeom>
+          <a:noFill/>
+        </p:spPr>
+        <p:txBody>
+          <a:bodyPr wrap="none">
+            <a:spAutoFit/>
+          </a:bodyPr>
+          <a:lstStyle/>
+          <a:p>
+            <a:r>
+              <a:t>Name: K.Santhosh Reddy</a:t>
+            </a:r>
+          </a:p>
+          <a:p>
+            <a:r>
+              <a:t>Cohort: 4 Batch A2</a:t>
+            </a:r>
+          </a:p>
+          <a:p>
+            <a:r>
+              <a:t>Mentor: Mr. Vamshi</a:t>
             </a:r>
           </a:p>
         </p:txBody>

--- a/WEEK_2_Day_9_Mentor_Review.pptx
+++ b/WEEK_2_Day_9_Mentor_Review.pptx
@@ -8,6 +8,7 @@
     <p:sldId id="256" r:id="rId7"/>
     <p:sldId id="257" r:id="rId8"/>
     <p:sldId id="258" r:id="rId9"/>
+    <p:sldId id="259" r:id="rId10"/>
   </p:sldIdLst>
   <p:sldSz cx="9144000" cy="6858000" type="screen4x3"/>
   <p:notesSz cx="6858000" cy="9144000"/>
@@ -3106,6 +3107,9 @@
           <a:lstStyle/>
           <a:p>
             <a:r>
+              <a:rPr>
+                <a:latin typeface="Times New Roman"/>
+              </a:rPr>
               <a:t>1. ROI &amp; Signal Extraction Strategy</a:t>
             </a:r>
           </a:p>
@@ -3135,6 +3139,9 @@
               <a:defRPr b="1" sz="1600"/>
             </a:pPr>
             <a:r>
+              <a:rPr>
+                <a:latin typeface="Times New Roman"/>
+              </a:rPr>
               <a:t>Candidate Transmitter ROI Detection:</a:t>
             </a:r>
           </a:p>
@@ -3143,6 +3150,9 @@
               <a:defRPr sz="1600"/>
             </a:pPr>
             <a:r>
+              <a:rPr>
+                <a:latin typeface="Times New Roman"/>
+              </a:rPr>
               <a:t>  • Approach: Convert frames to grayscale, apply Gaussian Blur, and use binary thresholding to isolate the brightest region (the LED).</a:t>
             </a:r>
           </a:p>
@@ -3151,6 +3161,9 @@
               <a:defRPr sz="1600"/>
             </a:pPr>
             <a:r>
+              <a:rPr>
+                <a:latin typeface="Times New Roman"/>
+              </a:rPr>
               <a:t>  • Draw a fixed bounding box around the centroid of the isolated bright pixels to serve as the ROI.</a:t>
             </a:r>
           </a:p>
@@ -3159,6 +3172,9 @@
               <a:defRPr b="1" sz="1600"/>
             </a:pPr>
             <a:r>
+              <a:rPr>
+                <a:latin typeface="Times New Roman"/>
+              </a:rPr>
               <a:t>Intensity Plotting Strategy:</a:t>
             </a:r>
           </a:p>
@@ -3167,6 +3183,9 @@
               <a:defRPr sz="1600"/>
             </a:pPr>
             <a:r>
+              <a:rPr>
+                <a:latin typeface="Times New Roman"/>
+              </a:rPr>
               <a:t>  • For every frame, calculate the mean pixel intensity exclusively within the bounded ROI.</a:t>
             </a:r>
           </a:p>
@@ -3175,6 +3194,9 @@
               <a:defRPr sz="1600"/>
             </a:pPr>
             <a:r>
+              <a:rPr>
+                <a:latin typeface="Times New Roman"/>
+              </a:rPr>
               <a:t>  • Plot this mean intensity over time (frames) to visualize the raw physical OOK signal.</a:t>
             </a:r>
           </a:p>
@@ -3201,21 +3223,7 @@
             <a:spAutoFit/>
           </a:bodyPr>
           <a:lstStyle/>
-          <a:p>
-            <a:r>
-              <a:t>Name: K.Santhosh Reddy</a:t>
-            </a:r>
-          </a:p>
-          <a:p>
-            <a:r>
-              <a:t>Cohort: 4 Batch A2</a:t>
-            </a:r>
-          </a:p>
-          <a:p>
-            <a:r>
-              <a:t>Mentor: Mr. Vamshi</a:t>
-            </a:r>
-          </a:p>
+          <a:p/>
         </p:txBody>
       </p:sp>
     </p:spTree>
@@ -3252,6 +3260,9 @@
           <a:lstStyle/>
           <a:p>
             <a:r>
+              <a:rPr>
+                <a:latin typeface="Times New Roman"/>
+              </a:rPr>
               <a:t>2. Synchronization &amp; Evaluation Approach</a:t>
             </a:r>
           </a:p>
@@ -3281,6 +3292,9 @@
               <a:defRPr b="1" sz="1600"/>
             </a:pPr>
             <a:r>
+              <a:rPr>
+                <a:latin typeface="Times New Roman"/>
+              </a:rPr>
               <a:t>Symbol Synchronization (260 FPS vs 92 bps):</a:t>
             </a:r>
           </a:p>
@@ -3289,6 +3303,9 @@
               <a:defRPr sz="1600"/>
             </a:pPr>
             <a:r>
+              <a:rPr>
+                <a:latin typeface="Times New Roman"/>
+              </a:rPr>
               <a:t>  • Since the camera records at ~260 FPS and transmission is at 92 bps, each transmitted bit spans approximately 2.82 frames.</a:t>
             </a:r>
           </a:p>
@@ -3297,6 +3314,9 @@
               <a:defRPr sz="1600"/>
             </a:pPr>
             <a:r>
+              <a:rPr>
+                <a:latin typeface="Times New Roman"/>
+              </a:rPr>
               <a:t>  • We will resample or apply a moving average window of size 3 to smooth the signal and sample the center of each bit period.</a:t>
             </a:r>
           </a:p>
@@ -3305,6 +3325,9 @@
               <a:defRPr b="1" sz="1600"/>
             </a:pPr>
             <a:r>
+              <a:rPr>
+                <a:latin typeface="Times New Roman"/>
+              </a:rPr>
               <a:t>Evaluation Criteria:</a:t>
             </a:r>
           </a:p>
@@ -3313,6 +3336,9 @@
               <a:defRPr sz="1600"/>
             </a:pPr>
             <a:r>
+              <a:rPr>
+                <a:latin typeface="Times New Roman"/>
+              </a:rPr>
               <a:t>  • Primary Metric: Bit Error Rate (BER) against the expected OOK sequence.</a:t>
             </a:r>
           </a:p>
@@ -3321,6 +3347,9 @@
               <a:defRPr sz="1600"/>
             </a:pPr>
             <a:r>
+              <a:rPr>
+                <a:latin typeface="Times New Roman"/>
+              </a:rPr>
               <a:t>  • Secondary Metric: Decoding Accuracy (exact string match of reconstructed text).</a:t>
             </a:r>
           </a:p>
@@ -3360,6 +3389,9 @@
           <a:lstStyle/>
           <a:p>
             <a:r>
+              <a:rPr>
+                <a:latin typeface="Times New Roman"/>
+              </a:rPr>
               <a:t>3. Frozen Preprocessing Plan</a:t>
             </a:r>
           </a:p>
@@ -3389,6 +3421,9 @@
               <a:defRPr b="1" sz="1600"/>
             </a:pPr>
             <a:r>
+              <a:rPr>
+                <a:latin typeface="Times New Roman"/>
+              </a:rPr>
               <a:t>The preprocessing pipeline is now frozen as follows:</a:t>
             </a:r>
           </a:p>
@@ -3397,6 +3432,9 @@
               <a:defRPr b="0" sz="1600"/>
             </a:pPr>
             <a:r>
+              <a:rPr>
+                <a:latin typeface="Times New Roman"/>
+              </a:rPr>
               <a:t>  1. Data Ingestion: Read raw video at native 260 FPS.</a:t>
             </a:r>
           </a:p>
@@ -3405,6 +3443,9 @@
               <a:defRPr sz="1600"/>
             </a:pPr>
             <a:r>
+              <a:rPr>
+                <a:latin typeface="Times New Roman"/>
+              </a:rPr>
               <a:t>  2. Grayscale Conversion: Drop RGB channels to reduce computational load.</a:t>
             </a:r>
           </a:p>
@@ -3413,6 +3454,9 @@
               <a:defRPr sz="1600"/>
             </a:pPr>
             <a:r>
+              <a:rPr>
+                <a:latin typeface="Times New Roman"/>
+              </a:rPr>
               <a:t>  3. Spatial Localization: Static bright-spot detection on Frame 0.</a:t>
             </a:r>
           </a:p>
@@ -3421,6 +3465,9 @@
               <a:defRPr sz="1600"/>
             </a:pPr>
             <a:r>
+              <a:rPr>
+                <a:latin typeface="Times New Roman"/>
+              </a:rPr>
               <a:t>  4. Temporal Extraction: Loop through all frames, appending ROI mean intensity to an array.</a:t>
             </a:r>
           </a:p>
@@ -3429,6 +3476,9 @@
               <a:defRPr sz="1600"/>
             </a:pPr>
             <a:r>
+              <a:rPr>
+                <a:latin typeface="Times New Roman"/>
+              </a:rPr>
               <a:t>  5. Output: Save the 1D intensity array (signal) for the modelling phase.</a:t>
             </a:r>
           </a:p>
@@ -3437,7 +3487,108 @@
               <a:defRPr b="1" sz="1600"/>
             </a:pPr>
             <a:r>
+              <a:rPr>
+                <a:latin typeface="Times New Roman"/>
+              </a:rPr>
               <a:t>Status: Approved and ready for baseline model implementation.</a:t>
+            </a:r>
+          </a:p>
+        </p:txBody>
+      </p:sp>
+    </p:spTree>
+  </p:cSld>
+  <p:clrMapOvr>
+    <a:masterClrMapping/>
+  </p:clrMapOvr>
+</p:sld>
+</file>
+
+<file path=ppt/slides/slide4.xml><?xml version="1.0" encoding="utf-8"?>
+<p:sld xmlns:a="http://schemas.openxmlformats.org/drawingml/2006/main" xmlns:p="http://schemas.openxmlformats.org/presentationml/2006/main" xmlns:r="http://schemas.openxmlformats.org/officeDocument/2006/relationships">
+  <p:cSld>
+    <p:spTree>
+      <p:nvGrpSpPr>
+        <p:cNvPr id="1" name=""/>
+        <p:cNvGrpSpPr/>
+        <p:nvPr/>
+      </p:nvGrpSpPr>
+      <p:grpSpPr/>
+      <p:sp>
+        <p:nvSpPr>
+          <p:cNvPr id="2" name="Title 1"/>
+          <p:cNvSpPr>
+            <a:spLocks noGrp="1"/>
+          </p:cNvSpPr>
+          <p:nvPr>
+            <p:ph type="title"/>
+          </p:nvPr>
+        </p:nvSpPr>
+        <p:spPr/>
+        <p:txBody>
+          <a:bodyPr/>
+          <a:lstStyle/>
+          <a:p>
+            <a:r>
+              <a:rPr>
+                <a:latin typeface="Times New Roman"/>
+              </a:rPr>
+              <a:t>Project Details</a:t>
+            </a:r>
+          </a:p>
+        </p:txBody>
+      </p:sp>
+      <p:sp>
+        <p:nvSpPr>
+          <p:cNvPr id="3" name="Content Placeholder 2"/>
+          <p:cNvSpPr>
+            <a:spLocks noGrp="1"/>
+          </p:cNvSpPr>
+          <p:nvPr>
+            <p:ph idx="1"/>
+          </p:nvPr>
+        </p:nvSpPr>
+        <p:spPr/>
+        <p:txBody>
+          <a:bodyPr/>
+          <a:lstStyle/>
+          <a:p/>
+          <a:p>
+            <a:pPr>
+              <a:spcAft>
+                <a:spcPts val="1400"/>
+              </a:spcAft>
+            </a:pPr>
+            <a:r>
+              <a:rPr sz="2800">
+                <a:latin typeface="Times New Roman"/>
+              </a:rPr>
+              <a:t>Name: K.Santhosh Reddy</a:t>
+            </a:r>
+          </a:p>
+          <a:p>
+            <a:pPr>
+              <a:spcAft>
+                <a:spcPts val="1400"/>
+              </a:spcAft>
+            </a:pPr>
+            <a:r>
+              <a:rPr sz="2800">
+                <a:latin typeface="Times New Roman"/>
+              </a:rPr>
+              <a:t>Cohort: 4 Batch A2</a:t>
+            </a:r>
+          </a:p>
+          <a:p>
+            <a:pPr>
+              <a:spcAft>
+                <a:spcPts val="1400"/>
+              </a:spcAft>
+            </a:pPr>
+            <a:r>
+              <a:rPr sz="2800">
+                <a:latin typeface="Times New Roman"/>
+              </a:rPr>
+              <a:t>Mentor: Mr. Vamshi</a:t>
             </a:r>
           </a:p>
         </p:txBody>

--- a/WEEK_2_Day_9_Mentor_Review.pptx
+++ b/WEEK_2_Day_9_Mentor_Review.pptx
@@ -5,6 +5,7 @@
     <p:sldMasterId id="2147483648" r:id="rId1"/>
   </p:sldMasterIdLst>
   <p:sldIdLst>
+    <p:sldId id="259" r:id="rId10"/>
     <p:sldId id="256" r:id="rId7"/>
     <p:sldId id="257" r:id="rId8"/>
     <p:sldId id="258" r:id="rId9"/>
@@ -3106,6 +3107,9 @@
           <a:lstStyle/>
           <a:p>
             <a:r>
+              <a:rPr>
+                <a:latin typeface="Times New Roman"/>
+              </a:rPr>
               <a:t>1. ROI &amp; Signal Extraction Strategy</a:t>
             </a:r>
           </a:p>
@@ -3135,6 +3139,9 @@
               <a:defRPr b="1" sz="1600"/>
             </a:pPr>
             <a:r>
+              <a:rPr>
+                <a:latin typeface="Times New Roman"/>
+              </a:rPr>
               <a:t>Candidate Transmitter ROI Detection:</a:t>
             </a:r>
           </a:p>
@@ -3143,6 +3150,9 @@
               <a:defRPr sz="1600"/>
             </a:pPr>
             <a:r>
+              <a:rPr>
+                <a:latin typeface="Times New Roman"/>
+              </a:rPr>
               <a:t>  • Approach: Convert frames to grayscale, apply Gaussian Blur, and use binary thresholding to isolate the brightest region (the LED).</a:t>
             </a:r>
           </a:p>
@@ -3151,6 +3161,9 @@
               <a:defRPr sz="1600"/>
             </a:pPr>
             <a:r>
+              <a:rPr>
+                <a:latin typeface="Times New Roman"/>
+              </a:rPr>
               <a:t>  • Draw a fixed bounding box around the centroid of the isolated bright pixels to serve as the ROI.</a:t>
             </a:r>
           </a:p>
@@ -3159,6 +3172,9 @@
               <a:defRPr b="1" sz="1600"/>
             </a:pPr>
             <a:r>
+              <a:rPr>
+                <a:latin typeface="Times New Roman"/>
+              </a:rPr>
               <a:t>Intensity Plotting Strategy:</a:t>
             </a:r>
           </a:p>
@@ -3167,6 +3183,9 @@
               <a:defRPr sz="1600"/>
             </a:pPr>
             <a:r>
+              <a:rPr>
+                <a:latin typeface="Times New Roman"/>
+              </a:rPr>
               <a:t>  • For every frame, calculate the mean pixel intensity exclusively within the bounded ROI.</a:t>
             </a:r>
           </a:p>
@@ -3175,9 +3194,36 @@
               <a:defRPr sz="1600"/>
             </a:pPr>
             <a:r>
+              <a:rPr>
+                <a:latin typeface="Times New Roman"/>
+              </a:rPr>
               <a:t>  • Plot this mean intensity over time (frames) to visualize the raw physical OOK signal.</a:t>
             </a:r>
           </a:p>
+        </p:txBody>
+      </p:sp>
+      <p:sp>
+        <p:nvSpPr>
+          <p:cNvPr id="4" name="TextBox 3"/>
+          <p:cNvSpPr txBox="1"/>
+          <p:nvPr/>
+        </p:nvSpPr>
+        <p:spPr>
+          <a:xfrm>
+            <a:off x="457200" y="182880"/>
+            <a:ext cx="4572000" cy="914400"/>
+          </a:xfrm>
+          <a:prstGeom prst="rect">
+            <a:avLst/>
+          </a:prstGeom>
+          <a:noFill/>
+        </p:spPr>
+        <p:txBody>
+          <a:bodyPr wrap="none">
+            <a:spAutoFit/>
+          </a:bodyPr>
+          <a:lstStyle/>
+          <a:p/>
         </p:txBody>
       </p:sp>
     </p:spTree>
@@ -3214,7 +3260,10 @@
           <a:lstStyle/>
           <a:p>
             <a:r>
-              <a:t>2. Synchronization &amp; Evaluation Approach</a:t>
+              <a:rPr>
+                <a:latin typeface="Times New Roman"/>
+              </a:rPr>
+              <a:t>Project Details</a:t>
             </a:r>
           </a:p>
         </p:txBody>
@@ -3233,57 +3282,44 @@
         <p:txBody>
           <a:bodyPr/>
           <a:lstStyle/>
+          <a:p/>
           <a:p>
             <a:pPr>
-              <a:defRPr sz="1600"/>
+              <a:spcAft>
+                <a:spcPts val="1400"/>
+              </a:spcAft>
             </a:pPr>
+            <a:r>
+              <a:rPr sz="2800">
+                <a:latin typeface="Times New Roman"/>
+              </a:rPr>
+              <a:t>Name: K.Santhosh Reddy</a:t>
+            </a:r>
           </a:p>
           <a:p>
             <a:pPr>
-              <a:defRPr b="1" sz="1600"/>
+              <a:spcAft>
+                <a:spcPts val="1400"/>
+              </a:spcAft>
             </a:pPr>
             <a:r>
-              <a:t>Symbol Synchronization (260 FPS vs 92 bps):</a:t>
+              <a:rPr sz="2800">
+                <a:latin typeface="Times New Roman"/>
+              </a:rPr>
+              <a:t>Cohort: 4 Batch A2</a:t>
             </a:r>
           </a:p>
           <a:p>
             <a:pPr>
-              <a:defRPr sz="1600"/>
+              <a:spcAft>
+                <a:spcPts val="1400"/>
+              </a:spcAft>
             </a:pPr>
             <a:r>
-              <a:t>  • Since the camera records at ~260 FPS and transmission is at 92 bps, each transmitted bit spans approximately 2.82 frames.</a:t>
-            </a:r>
-          </a:p>
-          <a:p>
-            <a:pPr>
-              <a:defRPr sz="1600"/>
-            </a:pPr>
-            <a:r>
-              <a:t>  • We will resample or apply a moving average window of size 3 to smooth the signal and sample the center of each bit period.</a:t>
-            </a:r>
-          </a:p>
-          <a:p>
-            <a:pPr>
-              <a:defRPr b="1" sz="1600"/>
-            </a:pPr>
-            <a:r>
-              <a:t>Evaluation Criteria:</a:t>
-            </a:r>
-          </a:p>
-          <a:p>
-            <a:pPr>
-              <a:defRPr sz="1600"/>
-            </a:pPr>
-            <a:r>
-              <a:t>  • Primary Metric: Bit Error Rate (BER) against the expected OOK sequence.</a:t>
-            </a:r>
-          </a:p>
-          <a:p>
-            <a:pPr>
-              <a:defRPr sz="1600"/>
-            </a:pPr>
-            <a:r>
-              <a:t>  • Secondary Metric: Decoding Accuracy (exact string match of reconstructed text).</a:t>
+              <a:rPr sz="2800">
+                <a:latin typeface="Times New Roman"/>
+              </a:rPr>
+              <a:t>Mentor: Mr. Vamshi</a:t>
             </a:r>
           </a:p>
         </p:txBody>
@@ -3322,7 +3358,10 @@
           <a:lstStyle/>
           <a:p>
             <a:r>
-              <a:t>3. Frozen Preprocessing Plan</a:t>
+              <a:rPr>
+                <a:latin typeface="Times New Roman"/>
+              </a:rPr>
+              <a:t>2. Synchronization &amp; Evaluation Approach</a:t>
             </a:r>
           </a:p>
         </p:txBody>
@@ -3351,6 +3390,138 @@
               <a:defRPr b="1" sz="1600"/>
             </a:pPr>
             <a:r>
+              <a:rPr>
+                <a:latin typeface="Times New Roman"/>
+              </a:rPr>
+              <a:t>Symbol Synchronization (260 FPS vs 92 bps):</a:t>
+            </a:r>
+          </a:p>
+          <a:p>
+            <a:pPr>
+              <a:defRPr sz="1600"/>
+            </a:pPr>
+            <a:r>
+              <a:rPr>
+                <a:latin typeface="Times New Roman"/>
+              </a:rPr>
+              <a:t>  • Since the camera records at ~260 FPS and transmission is at 92 bps, each transmitted bit spans approximately 2.82 frames.</a:t>
+            </a:r>
+          </a:p>
+          <a:p>
+            <a:pPr>
+              <a:defRPr sz="1600"/>
+            </a:pPr>
+            <a:r>
+              <a:rPr>
+                <a:latin typeface="Times New Roman"/>
+              </a:rPr>
+              <a:t>  • We will resample or apply a moving average window of size 3 to smooth the signal and sample the center of each bit period.</a:t>
+            </a:r>
+          </a:p>
+          <a:p>
+            <a:pPr>
+              <a:defRPr b="1" sz="1600"/>
+            </a:pPr>
+            <a:r>
+              <a:rPr>
+                <a:latin typeface="Times New Roman"/>
+              </a:rPr>
+              <a:t>Evaluation Criteria:</a:t>
+            </a:r>
+          </a:p>
+          <a:p>
+            <a:pPr>
+              <a:defRPr sz="1600"/>
+            </a:pPr>
+            <a:r>
+              <a:rPr>
+                <a:latin typeface="Times New Roman"/>
+              </a:rPr>
+              <a:t>  • Primary Metric: Bit Error Rate (BER) against the expected OOK sequence.</a:t>
+            </a:r>
+          </a:p>
+          <a:p>
+            <a:pPr>
+              <a:defRPr sz="1600"/>
+            </a:pPr>
+            <a:r>
+              <a:rPr>
+                <a:latin typeface="Times New Roman"/>
+              </a:rPr>
+              <a:t>  • Secondary Metric: Decoding Accuracy (exact string match of reconstructed text).</a:t>
+            </a:r>
+          </a:p>
+        </p:txBody>
+      </p:sp>
+    </p:spTree>
+  </p:cSld>
+  <p:clrMapOvr>
+    <a:masterClrMapping/>
+  </p:clrMapOvr>
+</p:sld>
+</file>
+
+<file path=ppt/slides/slide4.xml><?xml version="1.0" encoding="utf-8"?>
+<p:sld xmlns:a="http://schemas.openxmlformats.org/drawingml/2006/main" xmlns:p="http://schemas.openxmlformats.org/presentationml/2006/main" xmlns:r="http://schemas.openxmlformats.org/officeDocument/2006/relationships">
+  <p:cSld>
+    <p:spTree>
+      <p:nvGrpSpPr>
+        <p:cNvPr id="1" name=""/>
+        <p:cNvGrpSpPr/>
+        <p:nvPr/>
+      </p:nvGrpSpPr>
+      <p:grpSpPr/>
+      <p:sp>
+        <p:nvSpPr>
+          <p:cNvPr id="2" name="Title 1"/>
+          <p:cNvSpPr>
+            <a:spLocks noGrp="1"/>
+          </p:cNvSpPr>
+          <p:nvPr>
+            <p:ph type="title"/>
+          </p:nvPr>
+        </p:nvSpPr>
+        <p:spPr/>
+        <p:txBody>
+          <a:bodyPr/>
+          <a:lstStyle/>
+          <a:p>
+            <a:r>
+              <a:rPr>
+                <a:latin typeface="Times New Roman"/>
+              </a:rPr>
+              <a:t>3. Frozen Preprocessing Plan</a:t>
+            </a:r>
+          </a:p>
+        </p:txBody>
+      </p:sp>
+      <p:sp>
+        <p:nvSpPr>
+          <p:cNvPr id="3" name="Content Placeholder 2"/>
+          <p:cNvSpPr>
+            <a:spLocks noGrp="1"/>
+          </p:cNvSpPr>
+          <p:nvPr>
+            <p:ph idx="1"/>
+          </p:nvPr>
+        </p:nvSpPr>
+        <p:spPr/>
+        <p:txBody>
+          <a:bodyPr/>
+          <a:lstStyle/>
+          <a:p>
+            <a:pPr>
+              <a:defRPr sz="1600"/>
+            </a:pPr>
+          </a:p>
+          <a:p>
+            <a:pPr>
+              <a:defRPr b="1" sz="1600"/>
+            </a:pPr>
+            <a:r>
+              <a:rPr>
+                <a:latin typeface="Times New Roman"/>
+              </a:rPr>
               <a:t>The preprocessing pipeline is now frozen as follows:</a:t>
             </a:r>
           </a:p>
@@ -3359,6 +3530,9 @@
               <a:defRPr b="0" sz="1600"/>
             </a:pPr>
             <a:r>
+              <a:rPr>
+                <a:latin typeface="Times New Roman"/>
+              </a:rPr>
               <a:t>  1. Data Ingestion: Read raw video at native 260 FPS.</a:t>
             </a:r>
           </a:p>
@@ -3367,6 +3541,9 @@
               <a:defRPr sz="1600"/>
             </a:pPr>
             <a:r>
+              <a:rPr>
+                <a:latin typeface="Times New Roman"/>
+              </a:rPr>
               <a:t>  2. Grayscale Conversion: Drop RGB channels to reduce computational load.</a:t>
             </a:r>
           </a:p>
@@ -3375,6 +3552,9 @@
               <a:defRPr sz="1600"/>
             </a:pPr>
             <a:r>
+              <a:rPr>
+                <a:latin typeface="Times New Roman"/>
+              </a:rPr>
               <a:t>  3. Spatial Localization: Static bright-spot detection on Frame 0.</a:t>
             </a:r>
           </a:p>
@@ -3383,6 +3563,9 @@
               <a:defRPr sz="1600"/>
             </a:pPr>
             <a:r>
+              <a:rPr>
+                <a:latin typeface="Times New Roman"/>
+              </a:rPr>
               <a:t>  4. Temporal Extraction: Loop through all frames, appending ROI mean intensity to an array.</a:t>
             </a:r>
           </a:p>
@@ -3391,6 +3574,9 @@
               <a:defRPr sz="1600"/>
             </a:pPr>
             <a:r>
+              <a:rPr>
+                <a:latin typeface="Times New Roman"/>
+              </a:rPr>
               <a:t>  5. Output: Save the 1D intensity array (signal) for the modelling phase.</a:t>
             </a:r>
           </a:p>
@@ -3399,6 +3585,9 @@
               <a:defRPr b="1" sz="1600"/>
             </a:pPr>
             <a:r>
+              <a:rPr>
+                <a:latin typeface="Times New Roman"/>
+              </a:rPr>
               <a:t>Status: Approved and ready for baseline model implementation.</a:t>
             </a:r>
           </a:p>
